--- a/docs/Lectures/Week03/Week03_GEOG2475_Projection_Thursday_update.pptx
+++ b/docs/Lectures/Week03/Week03_GEOG2475_Projection_Thursday_update.pptx
@@ -3023,7 +3023,7 @@
             <a:fld id="{66C520B4-85AA-9542-8CF7-3D2DDCE6041D}" type="datetimeFigureOut">
               <a:rPr lang="en-US" smtClean="0"/>
               <a:pPr/>
-              <a:t>9/3/2025</a:t>
+              <a:t>9/4/2025</a:t>
             </a:fld>
             <a:endParaRPr lang="en-US"/>
           </a:p>
@@ -7834,7 +7834,7 @@
           <a:p>
             <a:fld id="{A720AEDC-E445-4777-AA58-256DBE856A2E}" type="datetime1">
               <a:rPr lang="en-US" smtClean="0"/>
-              <a:t>9/3/2025</a:t>
+              <a:t>9/4/2025</a:t>
             </a:fld>
             <a:endParaRPr lang="en-US"/>
           </a:p>
@@ -8038,7 +8038,7 @@
           <a:p>
             <a:fld id="{637A43A2-25E5-4F4A-8CC5-2EB1720C6339}" type="datetime1">
               <a:rPr lang="en-US" smtClean="0"/>
-              <a:t>9/3/2025</a:t>
+              <a:t>9/4/2025</a:t>
             </a:fld>
             <a:endParaRPr lang="en-US"/>
           </a:p>
@@ -8401,7 +8401,7 @@
           <a:p>
             <a:fld id="{B211E9CE-A9D6-4C10-9743-25DD5C510D14}" type="datetime1">
               <a:rPr lang="en-US" smtClean="0"/>
-              <a:t>9/3/2025</a:t>
+              <a:t>9/4/2025</a:t>
             </a:fld>
             <a:endParaRPr lang="en-US"/>
           </a:p>
@@ -8713,7 +8713,7 @@
           <a:p>
             <a:fld id="{ED291B17-9318-49DB-B28B-6E5994AE9581}" type="datetime1">
               <a:rPr lang="en-US" smtClean="0"/>
-              <a:t>9/3/2025</a:t>
+              <a:t>9/4/2025</a:t>
             </a:fld>
             <a:endParaRPr lang="en-US" dirty="0"/>
           </a:p>
@@ -8911,7 +8911,7 @@
           <a:p>
             <a:fld id="{78DD82B9-B8EE-4375-B6FF-88FA6ABB15D9}" type="datetime1">
               <a:rPr lang="en-US" smtClean="0"/>
-              <a:t>9/3/2025</a:t>
+              <a:t>9/4/2025</a:t>
             </a:fld>
             <a:endParaRPr lang="en-US" dirty="0"/>
           </a:p>
@@ -9223,7 +9223,7 @@
           <a:p>
             <a:fld id="{B2497495-0637-405E-AE64-5CC7506D51F5}" type="datetime1">
               <a:rPr lang="en-US" smtClean="0"/>
-              <a:t>9/3/2025</a:t>
+              <a:t>9/4/2025</a:t>
             </a:fld>
             <a:endParaRPr lang="en-US" dirty="0"/>
           </a:p>
@@ -9476,7 +9476,7 @@
           <a:p>
             <a:fld id="{7BFFD690-9426-415D-8B65-26881E07B2D4}" type="datetime1">
               <a:rPr lang="en-US" smtClean="0"/>
-              <a:t>9/3/2025</a:t>
+              <a:t>9/4/2025</a:t>
             </a:fld>
             <a:endParaRPr lang="en-US" dirty="0"/>
           </a:p>
@@ -9898,7 +9898,7 @@
           <a:p>
             <a:fld id="{04C4989A-474C-40DE-95B9-011C28B71673}" type="datetime1">
               <a:rPr lang="en-US" smtClean="0"/>
-              <a:t>9/3/2025</a:t>
+              <a:t>9/4/2025</a:t>
             </a:fld>
             <a:endParaRPr lang="en-US" dirty="0"/>
           </a:p>
@@ -10021,7 +10021,7 @@
           <a:p>
             <a:fld id="{5DB4ED54-5B5E-4A04-93D3-5772E3CE3818}" type="datetime1">
               <a:rPr lang="en-US" smtClean="0"/>
-              <a:t>9/3/2025</a:t>
+              <a:t>9/4/2025</a:t>
             </a:fld>
             <a:endParaRPr lang="en-US" dirty="0"/>
           </a:p>
@@ -10116,7 +10116,7 @@
           <a:p>
             <a:fld id="{4EDE50D6-574B-40AF-946F-D52A04ADE379}" type="datetime1">
               <a:rPr lang="en-US" smtClean="0"/>
-              <a:t>9/3/2025</a:t>
+              <a:t>9/4/2025</a:t>
             </a:fld>
             <a:endParaRPr lang="en-US" dirty="0"/>
           </a:p>
@@ -10493,7 +10493,7 @@
           <a:p>
             <a:fld id="{D82884F1-FFEA-405F-9602-3DCA865EDA4E}" type="datetime1">
               <a:rPr lang="en-US" smtClean="0"/>
-              <a:t>9/3/2025</a:t>
+              <a:t>9/4/2025</a:t>
             </a:fld>
             <a:endParaRPr lang="en-US" dirty="0"/>
           </a:p>
@@ -10702,7 +10702,7 @@
           <a:p>
             <a:fld id="{2AFFDC0E-2571-4B49-A099-A35911FE2571}" type="datetime1">
               <a:rPr lang="en-US" smtClean="0"/>
-              <a:t>9/3/2025</a:t>
+              <a:t>9/4/2025</a:t>
             </a:fld>
             <a:endParaRPr lang="en-US"/>
           </a:p>
@@ -10985,7 +10985,7 @@
           <a:p>
             <a:fld id="{7E18DB4A-8810-4A10-AD5C-D5E2C667F5B3}" type="datetime1">
               <a:rPr lang="en-US" smtClean="0"/>
-              <a:t>9/3/2025</a:t>
+              <a:t>9/4/2025</a:t>
             </a:fld>
             <a:endParaRPr lang="en-US" dirty="0"/>
           </a:p>
@@ -11177,7 +11177,7 @@
           <a:p>
             <a:fld id="{2CED4963-E985-44C4-B8C4-FDD613B7C2F8}" type="datetime1">
               <a:rPr lang="en-US" smtClean="0"/>
-              <a:t>9/3/2025</a:t>
+              <a:t>9/4/2025</a:t>
             </a:fld>
             <a:endParaRPr lang="en-US" dirty="0"/>
           </a:p>
@@ -11539,7 +11539,7 @@
           <a:p>
             <a:fld id="{ED291B17-9318-49DB-B28B-6E5994AE9581}" type="datetime1">
               <a:rPr lang="en-US" smtClean="0"/>
-              <a:t>9/3/2025</a:t>
+              <a:t>9/4/2025</a:t>
             </a:fld>
             <a:endParaRPr lang="en-US" dirty="0"/>
           </a:p>
@@ -12019,7 +12019,7 @@
           <a:p>
             <a:fld id="{ED291B17-9318-49DB-B28B-6E5994AE9581}" type="datetime1">
               <a:rPr lang="en-US" smtClean="0"/>
-              <a:t>9/3/2025</a:t>
+              <a:t>9/4/2025</a:t>
             </a:fld>
             <a:endParaRPr lang="en-US" dirty="0"/>
           </a:p>
@@ -12215,7 +12215,7 @@
           <a:p>
             <a:fld id="{78DD82B9-B8EE-4375-B6FF-88FA6ABB15D9}" type="datetime1">
               <a:rPr lang="en-US" smtClean="0"/>
-              <a:t>9/3/2025</a:t>
+              <a:t>9/4/2025</a:t>
             </a:fld>
             <a:endParaRPr lang="en-US" dirty="0"/>
           </a:p>
@@ -12526,7 +12526,7 @@
           <a:p>
             <a:fld id="{B2497495-0637-405E-AE64-5CC7506D51F5}" type="datetime1">
               <a:rPr lang="en-US" smtClean="0"/>
-              <a:t>9/3/2025</a:t>
+              <a:t>9/4/2025</a:t>
             </a:fld>
             <a:endParaRPr lang="en-US" dirty="0"/>
           </a:p>
@@ -12777,7 +12777,7 @@
           <a:p>
             <a:fld id="{7BFFD690-9426-415D-8B65-26881E07B2D4}" type="datetime1">
               <a:rPr lang="en-US" smtClean="0"/>
-              <a:t>9/3/2025</a:t>
+              <a:t>9/4/2025</a:t>
             </a:fld>
             <a:endParaRPr lang="en-US" dirty="0"/>
           </a:p>
@@ -13197,7 +13197,7 @@
           <a:p>
             <a:fld id="{04C4989A-474C-40DE-95B9-011C28B71673}" type="datetime1">
               <a:rPr lang="en-US" smtClean="0"/>
-              <a:t>9/3/2025</a:t>
+              <a:t>9/4/2025</a:t>
             </a:fld>
             <a:endParaRPr lang="en-US" dirty="0"/>
           </a:p>
@@ -13320,7 +13320,7 @@
           <a:p>
             <a:fld id="{5DB4ED54-5B5E-4A04-93D3-5772E3CE3818}" type="datetime1">
               <a:rPr lang="en-US" smtClean="0"/>
-              <a:t>9/3/2025</a:t>
+              <a:t>9/4/2025</a:t>
             </a:fld>
             <a:endParaRPr lang="en-US" dirty="0"/>
           </a:p>
@@ -13620,7 +13620,7 @@
           <a:p>
             <a:fld id="{52A49ABB-4417-47CD-80B9-0D55D8A8F9A6}" type="datetime1">
               <a:rPr lang="en-US" smtClean="0"/>
-              <a:t>9/3/2025</a:t>
+              <a:t>9/4/2025</a:t>
             </a:fld>
             <a:endParaRPr lang="en-US"/>
           </a:p>
@@ -13728,7 +13728,7 @@
           <a:p>
             <a:fld id="{4EDE50D6-574B-40AF-946F-D52A04ADE379}" type="datetime1">
               <a:rPr lang="en-US" smtClean="0"/>
-              <a:t>9/3/2025</a:t>
+              <a:t>9/4/2025</a:t>
             </a:fld>
             <a:endParaRPr lang="en-US" dirty="0"/>
           </a:p>
@@ -14104,7 +14104,7 @@
           <a:p>
             <a:fld id="{D82884F1-FFEA-405F-9602-3DCA865EDA4E}" type="datetime1">
               <a:rPr lang="en-US" smtClean="0"/>
-              <a:t>9/3/2025</a:t>
+              <a:t>9/4/2025</a:t>
             </a:fld>
             <a:endParaRPr lang="en-US" dirty="0"/>
           </a:p>
@@ -14397,7 +14397,7 @@
           <a:p>
             <a:fld id="{7E18DB4A-8810-4A10-AD5C-D5E2C667F5B3}" type="datetime1">
               <a:rPr lang="en-US" smtClean="0"/>
-              <a:t>9/3/2025</a:t>
+              <a:t>9/4/2025</a:t>
             </a:fld>
             <a:endParaRPr lang="en-US" dirty="0"/>
           </a:p>
@@ -14589,7 +14589,7 @@
           <a:p>
             <a:fld id="{2CED4963-E985-44C4-B8C4-FDD613B7C2F8}" type="datetime1">
               <a:rPr lang="en-US" smtClean="0"/>
-              <a:t>9/3/2025</a:t>
+              <a:t>9/4/2025</a:t>
             </a:fld>
             <a:endParaRPr lang="en-US" dirty="0"/>
           </a:p>
@@ -14951,7 +14951,7 @@
           <a:p>
             <a:fld id="{ED291B17-9318-49DB-B28B-6E5994AE9581}" type="datetime1">
               <a:rPr lang="en-US" smtClean="0"/>
-              <a:t>9/3/2025</a:t>
+              <a:t>9/4/2025</a:t>
             </a:fld>
             <a:endParaRPr lang="en-US" dirty="0"/>
           </a:p>
@@ -15204,7 +15204,7 @@
           <a:p>
             <a:fld id="{5A34475E-0273-439D-974C-8782C6CF6085}" type="datetime1">
               <a:rPr lang="en-US" smtClean="0"/>
-              <a:t>9/3/2025</a:t>
+              <a:t>9/4/2025</a:t>
             </a:fld>
             <a:endParaRPr lang="en-US"/>
           </a:p>
@@ -15627,7 +15627,7 @@
           <a:p>
             <a:fld id="{D3C4C3F7-B696-4E33-B8CA-A5029D94236E}" type="datetime1">
               <a:rPr lang="en-US" smtClean="0"/>
-              <a:t>9/3/2025</a:t>
+              <a:t>9/4/2025</a:t>
             </a:fld>
             <a:endParaRPr lang="en-US"/>
           </a:p>
@@ -15750,7 +15750,7 @@
           <a:p>
             <a:fld id="{19F242B4-A1B4-4224-ACE8-F64A6DFDF6CB}" type="datetime1">
               <a:rPr lang="en-US" smtClean="0"/>
-              <a:t>9/3/2025</a:t>
+              <a:t>9/4/2025</a:t>
             </a:fld>
             <a:endParaRPr lang="en-US"/>
           </a:p>
@@ -15846,7 +15846,7 @@
           <a:p>
             <a:fld id="{16D0FCFC-EFD5-4D6F-AF5D-114622F47081}" type="datetime1">
               <a:rPr lang="en-US" smtClean="0"/>
-              <a:t>9/3/2025</a:t>
+              <a:t>9/4/2025</a:t>
             </a:fld>
             <a:endParaRPr lang="en-US"/>
           </a:p>
@@ -16224,7 +16224,7 @@
           <a:p>
             <a:fld id="{FAFBCFB9-675F-4800-8AC7-ED3B357177A4}" type="datetime1">
               <a:rPr lang="en-US" smtClean="0"/>
-              <a:t>9/3/2025</a:t>
+              <a:t>9/4/2025</a:t>
             </a:fld>
             <a:endParaRPr lang="en-US"/>
           </a:p>
@@ -16517,7 +16517,7 @@
           <a:p>
             <a:fld id="{9D67AFB5-74EF-4A25-966B-E982CF09D51D}" type="datetime1">
               <a:rPr lang="en-US" smtClean="0"/>
-              <a:t>9/3/2025</a:t>
+              <a:t>9/4/2025</a:t>
             </a:fld>
             <a:endParaRPr lang="en-US"/>
           </a:p>
@@ -16731,7 +16731,7 @@
           <a:p>
             <a:fld id="{775824D9-FB06-4772-8A16-CEC7F6E704E4}" type="datetime1">
               <a:rPr lang="en-US" smtClean="0"/>
-              <a:t>9/3/2025</a:t>
+              <a:t>9/4/2025</a:t>
             </a:fld>
             <a:endParaRPr lang="en-US"/>
           </a:p>
@@ -17511,7 +17511,7 @@
           <a:p>
             <a:fld id="{ED291B17-9318-49DB-B28B-6E5994AE9581}" type="datetime1">
               <a:rPr lang="en-US" smtClean="0"/>
-              <a:t>9/3/2025</a:t>
+              <a:t>9/4/2025</a:t>
             </a:fld>
             <a:endParaRPr lang="en-US" dirty="0"/>
           </a:p>
@@ -18292,7 +18292,7 @@
           <a:p>
             <a:fld id="{ED291B17-9318-49DB-B28B-6E5994AE9581}" type="datetime1">
               <a:rPr lang="en-US" smtClean="0"/>
-              <a:t>9/3/2025</a:t>
+              <a:t>9/4/2025</a:t>
             </a:fld>
             <a:endParaRPr lang="en-US" dirty="0"/>
           </a:p>
